--- a/ใบงานที่8_สไลด์นำเสนอ.pptx
+++ b/ใบงานที่8_สไลด์นำเสนอ.pptx
@@ -9366,7 +9366,7 @@
         <p:spPr>
           <a:xfrm>
             <a:off x="5212080" y="1819656"/>
-            <a:ext cx="4206240" cy="530352"/>
+            <a:ext cx="6126480" cy="530352"/>
           </a:xfrm>
           <a:prstGeom prst="rect">
             <a:avLst/>
@@ -9382,7 +9382,7 @@
               <a:buNone/>
             </a:pPr>
             <a:r>
-              <a:rPr lang="th-TH" altLang="en-US" sz="1350" dirty="0">
+              <a:rPr lang="th-TH" altLang="en-US" sz="1400" dirty="0">
                 <a:solidFill>
                   <a:srgbClr val="1B1F23"/>
                 </a:solidFill>
@@ -9392,118 +9392,13 @@
               </a:rPr>
               <a:t>คิดเงินด้วยมือในตลาดสด: ช้า ผิดพลาด สต็อกไม่ตรง</a:t>
             </a:r>
-            <a:endParaRPr lang="th-TH" sz="1350" dirty="0"/>
-          </a:p>
-        </p:txBody>
-      </p:sp>
-      <p:sp>
-        <p:nvSpPr>
-          <p:cNvPr id="12" name="Text 9"/>
-          <p:cNvSpPr txBox="1"/>
-          <p:nvPr/>
-        </p:nvSpPr>
-        <p:spPr>
-          <a:xfrm>
-            <a:off x="9464040" y="1819656"/>
-            <a:ext cx="1005840" cy="530352"/>
-          </a:xfrm>
-          <a:prstGeom prst="rect">
-            <a:avLst/>
-          </a:prstGeom>
-          <a:noFill/>
-          <a:ln/>
-        </p:spPr>
-        <p:txBody>
-          <a:bodyPr wrap="square" lIns="0" tIns="0" rIns="0" bIns="0" rtlCol="0" anchor="ctr"/>
-          <a:lstStyle/>
-          <a:p>
-            <a:pPr indent="0" marL="0">
-              <a:buNone/>
-            </a:pPr>
-            <a:r>
-              <a:rPr lang="th-TH" altLang="en-US" sz="1200" dirty="0">
-                <a:solidFill>
-                  <a:srgbClr val="5F6B66"/>
-                </a:solidFill>
-                <a:latin typeface="Leelawadee UI" pitchFamily="34" charset="0"/>
-                <a:ea typeface="Leelawadee UI" pitchFamily="34" charset="-122"/>
-                <a:cs typeface="Leelawadee UI" pitchFamily="34" charset="-120"/>
-              </a:rPr>
-              <a:t>สไลด์ 3</a:t>
-            </a:r>
-            <a:endParaRPr lang="th-TH" sz="1200" dirty="0"/>
-          </a:p>
-        </p:txBody>
-      </p:sp>
-      <p:sp>
-        <p:nvSpPr>
-          <p:cNvPr id="13" name="Shape 10"/>
-          <p:cNvSpPr/>
-          <p:nvPr/>
-        </p:nvSpPr>
-        <p:spPr>
-          <a:xfrm>
-            <a:off x="10424160" y="1911096"/>
-            <a:ext cx="987552" cy="347472"/>
-          </a:xfrm>
-          <a:prstGeom prst="roundRect">
-            <a:avLst>
-              <a:gd name="adj" fmla="val 50000"/>
-            </a:avLst>
-          </a:prstGeom>
-          <a:solidFill>
-            <a:srgbClr val="FDECE7"/>
-          </a:solidFill>
-          <a:ln w="12700">
-            <a:solidFill>
-              <a:srgbClr val="FDECE7"/>
-            </a:solidFill>
-            <a:prstDash val="solid"/>
-          </a:ln>
-        </p:spPr>
-      </p:sp>
-      <p:sp>
-        <p:nvSpPr>
-          <p:cNvPr id="14" name="Text 11"/>
-          <p:cNvSpPr txBox="1"/>
-          <p:nvPr/>
-        </p:nvSpPr>
-        <p:spPr>
-          <a:xfrm>
-            <a:off x="10424160" y="1911096"/>
-            <a:ext cx="987552" cy="347472"/>
-          </a:xfrm>
-          <a:prstGeom prst="rect">
-            <a:avLst/>
-          </a:prstGeom>
-          <a:noFill/>
-          <a:ln/>
-        </p:spPr>
-        <p:txBody>
-          <a:bodyPr wrap="square" lIns="0" tIns="0" rIns="0" bIns="0" rtlCol="0" anchor="ctr"/>
-          <a:lstStyle/>
-          <a:p>
-            <a:pPr algn="ctr" indent="0" marL="0">
-              <a:buNone/>
-            </a:pPr>
-            <a:r>
-              <a:rPr lang="th-TH" altLang="en-US" sz="1050" b="1" dirty="0">
-                <a:solidFill>
-                  <a:srgbClr val="E76F51"/>
-                </a:solidFill>
-                <a:latin typeface="Leelawadee UI" pitchFamily="34" charset="0"/>
-                <a:ea typeface="Leelawadee UI" pitchFamily="34" charset="-122"/>
-                <a:cs typeface="Leelawadee UI" pitchFamily="34" charset="-120"/>
-              </a:rPr>
-              <a:t>0–1 นาที</a:t>
-            </a:r>
-            <a:endParaRPr lang="th-TH" sz="1050" dirty="0"/>
-          </a:p>
-        </p:txBody>
-      </p:sp>
-      <p:sp>
-        <p:nvSpPr>
-          <p:cNvPr id="15" name="Shape 12"/>
+            <a:endParaRPr lang="th-TH" sz="1400" dirty="0"/>
+          </a:p>
+        </p:txBody>
+      </p:sp>
+      <p:sp>
+        <p:nvSpPr>
+          <p:cNvPr id="12" name="Shape 9"/>
           <p:cNvSpPr/>
           <p:nvPr/>
         </p:nvSpPr>
@@ -9530,7 +9425,7 @@
       </p:sp>
       <p:sp>
         <p:nvSpPr>
-          <p:cNvPr id="16" name="Text 13"/>
+          <p:cNvPr id="13" name="Text 10"/>
           <p:cNvSpPr txBox="1"/>
           <p:nvPr/>
         </p:nvSpPr>
@@ -9569,7 +9464,7 @@
       </p:sp>
       <p:sp>
         <p:nvSpPr>
-          <p:cNvPr id="17" name="Shape 14"/>
+          <p:cNvPr id="14" name="Shape 11"/>
           <p:cNvSpPr/>
           <p:nvPr/>
         </p:nvSpPr>
@@ -9594,7 +9489,7 @@
       </p:sp>
       <p:pic>
         <p:nvPicPr>
-          <p:cNvPr id="18" name="Image 1" descr="preencoded.png">    </p:cNvPr>
+          <p:cNvPr id="15" name="Image 1" descr="preencoded.png">    </p:cNvPr>
           <p:cNvPicPr>
             <a:picLocks noChangeAspect="1"/>
           </p:cNvPicPr>
@@ -9618,7 +9513,7 @@
       </p:pic>
       <p:sp>
         <p:nvSpPr>
-          <p:cNvPr id="19" name="Text 15"/>
+          <p:cNvPr id="16" name="Text 12"/>
           <p:cNvSpPr txBox="1"/>
           <p:nvPr/>
         </p:nvSpPr>
@@ -9657,14 +9552,14 @@
       </p:sp>
       <p:sp>
         <p:nvSpPr>
-          <p:cNvPr id="20" name="Text 16"/>
+          <p:cNvPr id="17" name="Text 13"/>
           <p:cNvSpPr txBox="1"/>
           <p:nvPr/>
         </p:nvSpPr>
         <p:spPr>
           <a:xfrm>
             <a:off x="5212080" y="2734056"/>
-            <a:ext cx="4206240" cy="530352"/>
+            <a:ext cx="6126480" cy="530352"/>
           </a:xfrm>
           <a:prstGeom prst="rect">
             <a:avLst/>
@@ -9680,7 +9575,7 @@
               <a:buNone/>
             </a:pPr>
             <a:r>
-              <a:rPr lang="th-TH" altLang="en-US" sz="1350" dirty="0">
+              <a:rPr lang="th-TH" altLang="en-US" sz="1400" dirty="0">
                 <a:solidFill>
                   <a:srgbClr val="1B1F23"/>
                 </a:solidFill>
@@ -9690,64 +9585,89 @@
               </a:rPr>
               <a:t>AI Coding Assistant: งานวิจัย และวิธีที่กลุ่มใช้ AI</a:t>
             </a:r>
-            <a:endParaRPr lang="th-TH" sz="1350" dirty="0"/>
-          </a:p>
-        </p:txBody>
-      </p:sp>
-      <p:sp>
-        <p:nvSpPr>
-          <p:cNvPr id="21" name="Text 17"/>
-          <p:cNvSpPr txBox="1"/>
-          <p:nvPr/>
-        </p:nvSpPr>
-        <p:spPr>
-          <a:xfrm>
-            <a:off x="9464040" y="2734056"/>
-            <a:ext cx="1005840" cy="530352"/>
-          </a:xfrm>
-          <a:prstGeom prst="rect">
-            <a:avLst/>
-          </a:prstGeom>
-          <a:noFill/>
-          <a:ln/>
-        </p:spPr>
-        <p:txBody>
-          <a:bodyPr wrap="square" lIns="0" tIns="0" rIns="0" bIns="0" rtlCol="0" anchor="ctr"/>
-          <a:lstStyle/>
-          <a:p>
-            <a:pPr indent="0" marL="0">
-              <a:buNone/>
-            </a:pPr>
-            <a:r>
-              <a:rPr lang="th-TH" altLang="en-US" sz="1200" dirty="0">
-                <a:solidFill>
-                  <a:srgbClr val="5F6B66"/>
-                </a:solidFill>
-                <a:latin typeface="Leelawadee UI" pitchFamily="34" charset="0"/>
-                <a:ea typeface="Leelawadee UI" pitchFamily="34" charset="-122"/>
-                <a:cs typeface="Leelawadee UI" pitchFamily="34" charset="-120"/>
-              </a:rPr>
-              <a:t>สไลด์ 4–5</a:t>
-            </a:r>
-            <a:endParaRPr lang="th-TH" sz="1200" dirty="0"/>
-          </a:p>
-        </p:txBody>
-      </p:sp>
-      <p:sp>
-        <p:nvSpPr>
-          <p:cNvPr id="22" name="Shape 18"/>
+            <a:endParaRPr lang="th-TH" sz="1400" dirty="0"/>
+          </a:p>
+        </p:txBody>
+      </p:sp>
+      <p:sp>
+        <p:nvSpPr>
+          <p:cNvPr id="18" name="Shape 14"/>
           <p:cNvSpPr/>
           <p:nvPr/>
         </p:nvSpPr>
         <p:spPr>
           <a:xfrm>
-            <a:off x="10424160" y="2825496"/>
-            <a:ext cx="987552" cy="347472"/>
+            <a:off x="640080" y="3520440"/>
+            <a:ext cx="10908792" cy="786384"/>
           </a:xfrm>
           <a:prstGeom prst="roundRect">
             <a:avLst>
-              <a:gd name="adj" fmla="val 50000"/>
+              <a:gd name="adj" fmla="val 13953"/>
             </a:avLst>
+          </a:prstGeom>
+          <a:solidFill>
+            <a:srgbClr val="F7FAF8"/>
+          </a:solidFill>
+          <a:ln w="12700">
+            <a:solidFill>
+              <a:srgbClr val="DDE5E0"/>
+            </a:solidFill>
+            <a:prstDash val="solid"/>
+          </a:ln>
+        </p:spPr>
+      </p:sp>
+      <p:sp>
+        <p:nvSpPr>
+          <p:cNvPr id="19" name="Text 15"/>
+          <p:cNvSpPr txBox="1"/>
+          <p:nvPr/>
+        </p:nvSpPr>
+        <p:spPr>
+          <a:xfrm>
+            <a:off x="868680" y="3639312"/>
+            <a:ext cx="457200" cy="548640"/>
+          </a:xfrm>
+          <a:prstGeom prst="rect">
+            <a:avLst/>
+          </a:prstGeom>
+          <a:noFill/>
+          <a:ln/>
+        </p:spPr>
+        <p:txBody>
+          <a:bodyPr wrap="square" lIns="0" tIns="0" rIns="0" bIns="0" rtlCol="0" anchor="ctr"/>
+          <a:lstStyle/>
+          <a:p>
+            <a:pPr indent="0" marL="0">
+              <a:buNone/>
+            </a:pPr>
+            <a:r>
+              <a:rPr lang="th-TH" altLang="en-US" sz="2600" b="1" dirty="0">
+                <a:solidFill>
+                  <a:srgbClr val="2D6A4F"/>
+                </a:solidFill>
+                <a:latin typeface="Leelawadee UI" pitchFamily="34" charset="0"/>
+                <a:ea typeface="Leelawadee UI" pitchFamily="34" charset="-122"/>
+                <a:cs typeface="Leelawadee UI" pitchFamily="34" charset="-120"/>
+              </a:rPr>
+              <a:t>3</a:t>
+            </a:r>
+            <a:endParaRPr lang="th-TH" sz="2600" dirty="0"/>
+          </a:p>
+        </p:txBody>
+      </p:sp>
+      <p:sp>
+        <p:nvSpPr>
+          <p:cNvPr id="20" name="Shape 16"/>
+          <p:cNvSpPr/>
+          <p:nvPr/>
+        </p:nvSpPr>
+        <p:spPr>
+          <a:xfrm>
+            <a:off x="1417320" y="3657600"/>
+            <a:ext cx="512064" cy="512064"/>
+          </a:xfrm>
+          <a:prstGeom prst="ellipse">
+            <a:avLst/>
           </a:prstGeom>
           <a:solidFill>
             <a:srgbClr val="D8F3DC"/>
@@ -9760,16 +9680,40 @@
           </a:ln>
         </p:spPr>
       </p:sp>
-      <p:sp>
-        <p:nvSpPr>
-          <p:cNvPr id="23" name="Text 19"/>
-          <p:cNvSpPr txBox="1"/>
-          <p:nvPr/>
-        </p:nvSpPr>
-        <p:spPr>
-          <a:xfrm>
-            <a:off x="10424160" y="2825496"/>
-            <a:ext cx="987552" cy="347472"/>
+      <p:pic>
+        <p:nvPicPr>
+          <p:cNvPr id="21" name="Image 2" descr="preencoded.png">    </p:cNvPr>
+          <p:cNvPicPr>
+            <a:picLocks noChangeAspect="1"/>
+          </p:cNvPicPr>
+          <p:nvPr/>
+        </p:nvPicPr>
+        <p:blipFill>
+          <a:blip r:embed="rId3"/>
+          <a:stretch>
+            <a:fillRect/>
+          </a:stretch>
+        </p:blipFill>
+        <p:spPr>
+          <a:xfrm>
+            <a:off x="1550457" y="3790737"/>
+            <a:ext cx="245791" cy="245791"/>
+          </a:xfrm>
+          <a:prstGeom prst="rect">
+            <a:avLst/>
+          </a:prstGeom>
+        </p:spPr>
+      </p:pic>
+      <p:sp>
+        <p:nvSpPr>
+          <p:cNvPr id="22" name="Text 17"/>
+          <p:cNvSpPr txBox="1"/>
+          <p:nvPr/>
+        </p:nvSpPr>
+        <p:spPr>
+          <a:xfrm>
+            <a:off x="2148840" y="3648456"/>
+            <a:ext cx="3017520" cy="530352"/>
           </a:xfrm>
           <a:prstGeom prst="rect">
             <a:avLst/>
@@ -9781,11 +9725,116 @@
           <a:bodyPr wrap="square" lIns="0" tIns="0" rIns="0" bIns="0" rtlCol="0" anchor="ctr"/>
           <a:lstStyle/>
           <a:p>
-            <a:pPr algn="ctr" indent="0" marL="0">
-              <a:buNone/>
-            </a:pPr>
-            <a:r>
-              <a:rPr lang="th-TH" altLang="en-US" sz="1050" b="1" dirty="0">
+            <a:pPr indent="0" marL="0">
+              <a:buNone/>
+            </a:pPr>
+            <a:r>
+              <a:rPr lang="th-TH" altLang="en-US" sz="2000" b="1" dirty="0">
+                <a:solidFill>
+                  <a:srgbClr val="163A2E"/>
+                </a:solidFill>
+                <a:latin typeface="Leelawadee UI" pitchFamily="34" charset="0"/>
+                <a:ea typeface="Leelawadee UI" pitchFamily="34" charset="-122"/>
+                <a:cs typeface="Leelawadee UI" pitchFamily="34" charset="-120"/>
+              </a:rPr>
+              <a:t>Prototype</a:t>
+            </a:r>
+            <a:endParaRPr lang="th-TH" sz="2000" dirty="0"/>
+          </a:p>
+        </p:txBody>
+      </p:sp>
+      <p:sp>
+        <p:nvSpPr>
+          <p:cNvPr id="23" name="Text 18"/>
+          <p:cNvSpPr txBox="1"/>
+          <p:nvPr/>
+        </p:nvSpPr>
+        <p:spPr>
+          <a:xfrm>
+            <a:off x="5212080" y="3648456"/>
+            <a:ext cx="6126480" cy="530352"/>
+          </a:xfrm>
+          <a:prstGeom prst="rect">
+            <a:avLst/>
+          </a:prstGeom>
+          <a:noFill/>
+          <a:ln/>
+        </p:spPr>
+        <p:txBody>
+          <a:bodyPr wrap="square" lIns="0" tIns="0" rIns="0" bIns="0" rtlCol="0" anchor="ctr"/>
+          <a:lstStyle/>
+          <a:p>
+            <a:pPr indent="0" marL="0">
+              <a:buNone/>
+            </a:pPr>
+            <a:r>
+              <a:rPr lang="th-TH" altLang="en-US" sz="1400" dirty="0">
+                <a:solidFill>
+                  <a:srgbClr val="1B1F23"/>
+                </a:solidFill>
+                <a:latin typeface="Leelawadee UI" pitchFamily="34" charset="0"/>
+                <a:ea typeface="Leelawadee UI" pitchFamily="34" charset="-122"/>
+                <a:cs typeface="Leelawadee UI" pitchFamily="34" charset="-120"/>
+              </a:rPr>
+              <a:t>ระบบที่พัฒนา สถาปัตยกรรม 3 ชั้น และกลไกตัดสต็อก</a:t>
+            </a:r>
+            <a:endParaRPr lang="th-TH" sz="1400" dirty="0"/>
+          </a:p>
+        </p:txBody>
+      </p:sp>
+      <p:sp>
+        <p:nvSpPr>
+          <p:cNvPr id="24" name="Shape 19"/>
+          <p:cNvSpPr/>
+          <p:nvPr/>
+        </p:nvSpPr>
+        <p:spPr>
+          <a:xfrm>
+            <a:off x="640080" y="4434840"/>
+            <a:ext cx="10908792" cy="786384"/>
+          </a:xfrm>
+          <a:prstGeom prst="roundRect">
+            <a:avLst>
+              <a:gd name="adj" fmla="val 13953"/>
+            </a:avLst>
+          </a:prstGeom>
+          <a:solidFill>
+            <a:srgbClr val="FFFFFF"/>
+          </a:solidFill>
+          <a:ln w="12700">
+            <a:solidFill>
+              <a:srgbClr val="DDE5E0"/>
+            </a:solidFill>
+            <a:prstDash val="solid"/>
+          </a:ln>
+        </p:spPr>
+      </p:sp>
+      <p:sp>
+        <p:nvSpPr>
+          <p:cNvPr id="25" name="Text 20"/>
+          <p:cNvSpPr txBox="1"/>
+          <p:nvPr/>
+        </p:nvSpPr>
+        <p:spPr>
+          <a:xfrm>
+            <a:off x="868680" y="4553712"/>
+            <a:ext cx="457200" cy="548640"/>
+          </a:xfrm>
+          <a:prstGeom prst="rect">
+            <a:avLst/>
+          </a:prstGeom>
+          <a:noFill/>
+          <a:ln/>
+        </p:spPr>
+        <p:txBody>
+          <a:bodyPr wrap="square" lIns="0" tIns="0" rIns="0" bIns="0" rtlCol="0" anchor="ctr"/>
+          <a:lstStyle/>
+          <a:p>
+            <a:pPr indent="0" marL="0">
+              <a:buNone/>
+            </a:pPr>
+            <a:r>
+              <a:rPr lang="th-TH" altLang="en-US" sz="2600" b="1" dirty="0">
                 <a:solidFill>
                   <a:srgbClr val="2D6A4F"/>
                 </a:solidFill>
@@ -9793,21 +9842,148 @@
                 <a:ea typeface="Leelawadee UI" pitchFamily="34" charset="-122"/>
                 <a:cs typeface="Leelawadee UI" pitchFamily="34" charset="-120"/>
               </a:rPr>
-              <a:t>1–3.5 นาที</a:t>
-            </a:r>
-            <a:endParaRPr lang="th-TH" sz="1050" dirty="0"/>
-          </a:p>
-        </p:txBody>
-      </p:sp>
-      <p:sp>
-        <p:nvSpPr>
-          <p:cNvPr id="24" name="Shape 20"/>
+              <a:t>4</a:t>
+            </a:r>
+            <a:endParaRPr lang="th-TH" sz="2600" dirty="0"/>
+          </a:p>
+        </p:txBody>
+      </p:sp>
+      <p:sp>
+        <p:nvSpPr>
+          <p:cNvPr id="26" name="Shape 21"/>
           <p:cNvSpPr/>
           <p:nvPr/>
         </p:nvSpPr>
         <p:spPr>
           <a:xfrm>
-            <a:off x="640080" y="3520440"/>
+            <a:off x="1417320" y="4572000"/>
+            <a:ext cx="512064" cy="512064"/>
+          </a:xfrm>
+          <a:prstGeom prst="ellipse">
+            <a:avLst/>
+          </a:prstGeom>
+          <a:solidFill>
+            <a:srgbClr val="D8F3DC"/>
+          </a:solidFill>
+          <a:ln w="12700">
+            <a:solidFill>
+              <a:srgbClr val="D8F3DC"/>
+            </a:solidFill>
+            <a:prstDash val="solid"/>
+          </a:ln>
+        </p:spPr>
+      </p:sp>
+      <p:pic>
+        <p:nvPicPr>
+          <p:cNvPr id="27" name="Image 3" descr="preencoded.png">    </p:cNvPr>
+          <p:cNvPicPr>
+            <a:picLocks noChangeAspect="1"/>
+          </p:cNvPicPr>
+          <p:nvPr/>
+        </p:nvPicPr>
+        <p:blipFill>
+          <a:blip r:embed="rId4"/>
+          <a:stretch>
+            <a:fillRect/>
+          </a:stretch>
+        </p:blipFill>
+        <p:spPr>
+          <a:xfrm>
+            <a:off x="1550457" y="4705137"/>
+            <a:ext cx="245791" cy="245791"/>
+          </a:xfrm>
+          <a:prstGeom prst="rect">
+            <a:avLst/>
+          </a:prstGeom>
+        </p:spPr>
+      </p:pic>
+      <p:sp>
+        <p:nvSpPr>
+          <p:cNvPr id="28" name="Text 22"/>
+          <p:cNvSpPr txBox="1"/>
+          <p:nvPr/>
+        </p:nvSpPr>
+        <p:spPr>
+          <a:xfrm>
+            <a:off x="2148840" y="4562856"/>
+            <a:ext cx="3017520" cy="530352"/>
+          </a:xfrm>
+          <a:prstGeom prst="rect">
+            <a:avLst/>
+          </a:prstGeom>
+          <a:noFill/>
+          <a:ln/>
+        </p:spPr>
+        <p:txBody>
+          <a:bodyPr wrap="square" lIns="0" tIns="0" rIns="0" bIns="0" rtlCol="0" anchor="ctr"/>
+          <a:lstStyle/>
+          <a:p>
+            <a:pPr indent="0" marL="0">
+              <a:buNone/>
+            </a:pPr>
+            <a:r>
+              <a:rPr lang="th-TH" altLang="en-US" sz="2000" b="1" dirty="0">
+                <a:solidFill>
+                  <a:srgbClr val="163A2E"/>
+                </a:solidFill>
+                <a:latin typeface="Leelawadee UI" pitchFamily="34" charset="0"/>
+                <a:ea typeface="Leelawadee UI" pitchFamily="34" charset="-122"/>
+                <a:cs typeface="Leelawadee UI" pitchFamily="34" charset="-120"/>
+              </a:rPr>
+              <a:t>Demo</a:t>
+            </a:r>
+            <a:endParaRPr lang="th-TH" sz="2000" dirty="0"/>
+          </a:p>
+        </p:txBody>
+      </p:sp>
+      <p:sp>
+        <p:nvSpPr>
+          <p:cNvPr id="29" name="Text 23"/>
+          <p:cNvSpPr txBox="1"/>
+          <p:nvPr/>
+        </p:nvSpPr>
+        <p:spPr>
+          <a:xfrm>
+            <a:off x="5212080" y="4562856"/>
+            <a:ext cx="6126480" cy="530352"/>
+          </a:xfrm>
+          <a:prstGeom prst="rect">
+            <a:avLst/>
+          </a:prstGeom>
+          <a:noFill/>
+          <a:ln/>
+        </p:spPr>
+        <p:txBody>
+          <a:bodyPr wrap="square" lIns="0" tIns="0" rIns="0" bIns="0" rtlCol="0" anchor="ctr"/>
+          <a:lstStyle/>
+          <a:p>
+            <a:pPr indent="0" marL="0">
+              <a:buNone/>
+            </a:pPr>
+            <a:r>
+              <a:rPr lang="th-TH" altLang="en-US" sz="1400" dirty="0">
+                <a:solidFill>
+                  <a:srgbClr val="1B1F23"/>
+                </a:solidFill>
+                <a:latin typeface="Leelawadee UI" pitchFamily="34" charset="0"/>
+                <a:ea typeface="Leelawadee UI" pitchFamily="34" charset="-122"/>
+                <a:cs typeface="Leelawadee UI" pitchFamily="34" charset="-120"/>
+              </a:rPr>
+              <a:t>สาธิตระบบจริงบน XAMPP + ผลการทดสอบ</a:t>
+            </a:r>
+            <a:endParaRPr lang="th-TH" sz="1400" dirty="0"/>
+          </a:p>
+        </p:txBody>
+      </p:sp>
+      <p:sp>
+        <p:nvSpPr>
+          <p:cNvPr id="30" name="Shape 24"/>
+          <p:cNvSpPr/>
+          <p:nvPr/>
+        </p:nvSpPr>
+        <p:spPr>
+          <a:xfrm>
+            <a:off x="640080" y="5349240"/>
             <a:ext cx="10908792" cy="786384"/>
           </a:xfrm>
           <a:prstGeom prst="roundRect">
@@ -9828,603 +10004,7 @@
       </p:sp>
       <p:sp>
         <p:nvSpPr>
-          <p:cNvPr id="25" name="Text 21"/>
-          <p:cNvSpPr txBox="1"/>
-          <p:nvPr/>
-        </p:nvSpPr>
-        <p:spPr>
-          <a:xfrm>
-            <a:off x="868680" y="3639312"/>
-            <a:ext cx="457200" cy="548640"/>
-          </a:xfrm>
-          <a:prstGeom prst="rect">
-            <a:avLst/>
-          </a:prstGeom>
-          <a:noFill/>
-          <a:ln/>
-        </p:spPr>
-        <p:txBody>
-          <a:bodyPr wrap="square" lIns="0" tIns="0" rIns="0" bIns="0" rtlCol="0" anchor="ctr"/>
-          <a:lstStyle/>
-          <a:p>
-            <a:pPr indent="0" marL="0">
-              <a:buNone/>
-            </a:pPr>
-            <a:r>
-              <a:rPr lang="th-TH" altLang="en-US" sz="2600" b="1" dirty="0">
-                <a:solidFill>
-                  <a:srgbClr val="2D6A4F"/>
-                </a:solidFill>
-                <a:latin typeface="Leelawadee UI" pitchFamily="34" charset="0"/>
-                <a:ea typeface="Leelawadee UI" pitchFamily="34" charset="-122"/>
-                <a:cs typeface="Leelawadee UI" pitchFamily="34" charset="-120"/>
-              </a:rPr>
-              <a:t>3</a:t>
-            </a:r>
-            <a:endParaRPr lang="th-TH" sz="2600" dirty="0"/>
-          </a:p>
-        </p:txBody>
-      </p:sp>
-      <p:sp>
-        <p:nvSpPr>
-          <p:cNvPr id="26" name="Shape 22"/>
-          <p:cNvSpPr/>
-          <p:nvPr/>
-        </p:nvSpPr>
-        <p:spPr>
-          <a:xfrm>
-            <a:off x="1417320" y="3657600"/>
-            <a:ext cx="512064" cy="512064"/>
-          </a:xfrm>
-          <a:prstGeom prst="ellipse">
-            <a:avLst/>
-          </a:prstGeom>
-          <a:solidFill>
-            <a:srgbClr val="D8F3DC"/>
-          </a:solidFill>
-          <a:ln w="12700">
-            <a:solidFill>
-              <a:srgbClr val="D8F3DC"/>
-            </a:solidFill>
-            <a:prstDash val="solid"/>
-          </a:ln>
-        </p:spPr>
-      </p:sp>
-      <p:pic>
-        <p:nvPicPr>
-          <p:cNvPr id="27" name="Image 2" descr="preencoded.png">    </p:cNvPr>
-          <p:cNvPicPr>
-            <a:picLocks noChangeAspect="1"/>
-          </p:cNvPicPr>
-          <p:nvPr/>
-        </p:nvPicPr>
-        <p:blipFill>
-          <a:blip r:embed="rId3"/>
-          <a:stretch>
-            <a:fillRect/>
-          </a:stretch>
-        </p:blipFill>
-        <p:spPr>
-          <a:xfrm>
-            <a:off x="1550457" y="3790737"/>
-            <a:ext cx="245791" cy="245791"/>
-          </a:xfrm>
-          <a:prstGeom prst="rect">
-            <a:avLst/>
-          </a:prstGeom>
-        </p:spPr>
-      </p:pic>
-      <p:sp>
-        <p:nvSpPr>
-          <p:cNvPr id="28" name="Text 23"/>
-          <p:cNvSpPr txBox="1"/>
-          <p:nvPr/>
-        </p:nvSpPr>
-        <p:spPr>
-          <a:xfrm>
-            <a:off x="2148840" y="3648456"/>
-            <a:ext cx="3017520" cy="530352"/>
-          </a:xfrm>
-          <a:prstGeom prst="rect">
-            <a:avLst/>
-          </a:prstGeom>
-          <a:noFill/>
-          <a:ln/>
-        </p:spPr>
-        <p:txBody>
-          <a:bodyPr wrap="square" lIns="0" tIns="0" rIns="0" bIns="0" rtlCol="0" anchor="ctr"/>
-          <a:lstStyle/>
-          <a:p>
-            <a:pPr indent="0" marL="0">
-              <a:buNone/>
-            </a:pPr>
-            <a:r>
-              <a:rPr lang="th-TH" altLang="en-US" sz="2000" b="1" dirty="0">
-                <a:solidFill>
-                  <a:srgbClr val="163A2E"/>
-                </a:solidFill>
-                <a:latin typeface="Leelawadee UI" pitchFamily="34" charset="0"/>
-                <a:ea typeface="Leelawadee UI" pitchFamily="34" charset="-122"/>
-                <a:cs typeface="Leelawadee UI" pitchFamily="34" charset="-120"/>
-              </a:rPr>
-              <a:t>Prototype</a:t>
-            </a:r>
-            <a:endParaRPr lang="th-TH" sz="2000" dirty="0"/>
-          </a:p>
-        </p:txBody>
-      </p:sp>
-      <p:sp>
-        <p:nvSpPr>
-          <p:cNvPr id="29" name="Text 24"/>
-          <p:cNvSpPr txBox="1"/>
-          <p:nvPr/>
-        </p:nvSpPr>
-        <p:spPr>
-          <a:xfrm>
-            <a:off x="5212080" y="3648456"/>
-            <a:ext cx="4206240" cy="530352"/>
-          </a:xfrm>
-          <a:prstGeom prst="rect">
-            <a:avLst/>
-          </a:prstGeom>
-          <a:noFill/>
-          <a:ln/>
-        </p:spPr>
-        <p:txBody>
-          <a:bodyPr wrap="square" lIns="0" tIns="0" rIns="0" bIns="0" rtlCol="0" anchor="ctr"/>
-          <a:lstStyle/>
-          <a:p>
-            <a:pPr indent="0" marL="0">
-              <a:buNone/>
-            </a:pPr>
-            <a:r>
-              <a:rPr lang="th-TH" altLang="en-US" sz="1350" dirty="0">
-                <a:solidFill>
-                  <a:srgbClr val="1B1F23"/>
-                </a:solidFill>
-                <a:latin typeface="Leelawadee UI" pitchFamily="34" charset="0"/>
-                <a:ea typeface="Leelawadee UI" pitchFamily="34" charset="-122"/>
-                <a:cs typeface="Leelawadee UI" pitchFamily="34" charset="-120"/>
-              </a:rPr>
-              <a:t>ระบบที่พัฒนา สถาปัตยกรรม 3 ชั้น และกลไกตัดสต็อก</a:t>
-            </a:r>
-            <a:endParaRPr lang="th-TH" sz="1350" dirty="0"/>
-          </a:p>
-        </p:txBody>
-      </p:sp>
-      <p:sp>
-        <p:nvSpPr>
-          <p:cNvPr id="30" name="Text 25"/>
-          <p:cNvSpPr txBox="1"/>
-          <p:nvPr/>
-        </p:nvSpPr>
-        <p:spPr>
-          <a:xfrm>
-            <a:off x="9464040" y="3648456"/>
-            <a:ext cx="1005840" cy="530352"/>
-          </a:xfrm>
-          <a:prstGeom prst="rect">
-            <a:avLst/>
-          </a:prstGeom>
-          <a:noFill/>
-          <a:ln/>
-        </p:spPr>
-        <p:txBody>
-          <a:bodyPr wrap="square" lIns="0" tIns="0" rIns="0" bIns="0" rtlCol="0" anchor="ctr"/>
-          <a:lstStyle/>
-          <a:p>
-            <a:pPr indent="0" marL="0">
-              <a:buNone/>
-            </a:pPr>
-            <a:r>
-              <a:rPr lang="th-TH" altLang="en-US" sz="1200" dirty="0">
-                <a:solidFill>
-                  <a:srgbClr val="5F6B66"/>
-                </a:solidFill>
-                <a:latin typeface="Leelawadee UI" pitchFamily="34" charset="0"/>
-                <a:ea typeface="Leelawadee UI" pitchFamily="34" charset="-122"/>
-                <a:cs typeface="Leelawadee UI" pitchFamily="34" charset="-120"/>
-              </a:rPr>
-              <a:t>สไลด์ 6–8</a:t>
-            </a:r>
-            <a:endParaRPr lang="th-TH" sz="1200" dirty="0"/>
-          </a:p>
-        </p:txBody>
-      </p:sp>
-      <p:sp>
-        <p:nvSpPr>
-          <p:cNvPr id="31" name="Shape 26"/>
-          <p:cNvSpPr/>
-          <p:nvPr/>
-        </p:nvSpPr>
-        <p:spPr>
-          <a:xfrm>
-            <a:off x="10424160" y="3739896"/>
-            <a:ext cx="987552" cy="347472"/>
-          </a:xfrm>
-          <a:prstGeom prst="roundRect">
-            <a:avLst>
-              <a:gd name="adj" fmla="val 50000"/>
-            </a:avLst>
-          </a:prstGeom>
-          <a:solidFill>
-            <a:srgbClr val="D8F3DC"/>
-          </a:solidFill>
-          <a:ln w="12700">
-            <a:solidFill>
-              <a:srgbClr val="D8F3DC"/>
-            </a:solidFill>
-            <a:prstDash val="solid"/>
-          </a:ln>
-        </p:spPr>
-      </p:sp>
-      <p:sp>
-        <p:nvSpPr>
-          <p:cNvPr id="32" name="Text 27"/>
-          <p:cNvSpPr txBox="1"/>
-          <p:nvPr/>
-        </p:nvSpPr>
-        <p:spPr>
-          <a:xfrm>
-            <a:off x="10424160" y="3739896"/>
-            <a:ext cx="987552" cy="347472"/>
-          </a:xfrm>
-          <a:prstGeom prst="rect">
-            <a:avLst/>
-          </a:prstGeom>
-          <a:noFill/>
-          <a:ln/>
-        </p:spPr>
-        <p:txBody>
-          <a:bodyPr wrap="square" lIns="0" tIns="0" rIns="0" bIns="0" rtlCol="0" anchor="ctr"/>
-          <a:lstStyle/>
-          <a:p>
-            <a:pPr algn="ctr" indent="0" marL="0">
-              <a:buNone/>
-            </a:pPr>
-            <a:r>
-              <a:rPr lang="th-TH" altLang="en-US" sz="1050" b="1" dirty="0">
-                <a:solidFill>
-                  <a:srgbClr val="2D6A4F"/>
-                </a:solidFill>
-                <a:latin typeface="Leelawadee UI" pitchFamily="34" charset="0"/>
-                <a:ea typeface="Leelawadee UI" pitchFamily="34" charset="-122"/>
-                <a:cs typeface="Leelawadee UI" pitchFamily="34" charset="-120"/>
-              </a:rPr>
-              <a:t>3.5–6 นาที</a:t>
-            </a:r>
-            <a:endParaRPr lang="th-TH" sz="1050" dirty="0"/>
-          </a:p>
-        </p:txBody>
-      </p:sp>
-      <p:sp>
-        <p:nvSpPr>
-          <p:cNvPr id="33" name="Shape 28"/>
-          <p:cNvSpPr/>
-          <p:nvPr/>
-        </p:nvSpPr>
-        <p:spPr>
-          <a:xfrm>
-            <a:off x="640080" y="4434840"/>
-            <a:ext cx="10908792" cy="786384"/>
-          </a:xfrm>
-          <a:prstGeom prst="roundRect">
-            <a:avLst>
-              <a:gd name="adj" fmla="val 13953"/>
-            </a:avLst>
-          </a:prstGeom>
-          <a:solidFill>
-            <a:srgbClr val="FFFFFF"/>
-          </a:solidFill>
-          <a:ln w="12700">
-            <a:solidFill>
-              <a:srgbClr val="DDE5E0"/>
-            </a:solidFill>
-            <a:prstDash val="solid"/>
-          </a:ln>
-        </p:spPr>
-      </p:sp>
-      <p:sp>
-        <p:nvSpPr>
-          <p:cNvPr id="34" name="Text 29"/>
-          <p:cNvSpPr txBox="1"/>
-          <p:nvPr/>
-        </p:nvSpPr>
-        <p:spPr>
-          <a:xfrm>
-            <a:off x="868680" y="4553712"/>
-            <a:ext cx="457200" cy="548640"/>
-          </a:xfrm>
-          <a:prstGeom prst="rect">
-            <a:avLst/>
-          </a:prstGeom>
-          <a:noFill/>
-          <a:ln/>
-        </p:spPr>
-        <p:txBody>
-          <a:bodyPr wrap="square" lIns="0" tIns="0" rIns="0" bIns="0" rtlCol="0" anchor="ctr"/>
-          <a:lstStyle/>
-          <a:p>
-            <a:pPr indent="0" marL="0">
-              <a:buNone/>
-            </a:pPr>
-            <a:r>
-              <a:rPr lang="th-TH" altLang="en-US" sz="2600" b="1" dirty="0">
-                <a:solidFill>
-                  <a:srgbClr val="2D6A4F"/>
-                </a:solidFill>
-                <a:latin typeface="Leelawadee UI" pitchFamily="34" charset="0"/>
-                <a:ea typeface="Leelawadee UI" pitchFamily="34" charset="-122"/>
-                <a:cs typeface="Leelawadee UI" pitchFamily="34" charset="-120"/>
-              </a:rPr>
-              <a:t>4</a:t>
-            </a:r>
-            <a:endParaRPr lang="th-TH" sz="2600" dirty="0"/>
-          </a:p>
-        </p:txBody>
-      </p:sp>
-      <p:sp>
-        <p:nvSpPr>
-          <p:cNvPr id="35" name="Shape 30"/>
-          <p:cNvSpPr/>
-          <p:nvPr/>
-        </p:nvSpPr>
-        <p:spPr>
-          <a:xfrm>
-            <a:off x="1417320" y="4572000"/>
-            <a:ext cx="512064" cy="512064"/>
-          </a:xfrm>
-          <a:prstGeom prst="ellipse">
-            <a:avLst/>
-          </a:prstGeom>
-          <a:solidFill>
-            <a:srgbClr val="D8F3DC"/>
-          </a:solidFill>
-          <a:ln w="12700">
-            <a:solidFill>
-              <a:srgbClr val="D8F3DC"/>
-            </a:solidFill>
-            <a:prstDash val="solid"/>
-          </a:ln>
-        </p:spPr>
-      </p:sp>
-      <p:pic>
-        <p:nvPicPr>
-          <p:cNvPr id="36" name="Image 3" descr="preencoded.png">    </p:cNvPr>
-          <p:cNvPicPr>
-            <a:picLocks noChangeAspect="1"/>
-          </p:cNvPicPr>
-          <p:nvPr/>
-        </p:nvPicPr>
-        <p:blipFill>
-          <a:blip r:embed="rId4"/>
-          <a:stretch>
-            <a:fillRect/>
-          </a:stretch>
-        </p:blipFill>
-        <p:spPr>
-          <a:xfrm>
-            <a:off x="1550457" y="4705137"/>
-            <a:ext cx="245791" cy="245791"/>
-          </a:xfrm>
-          <a:prstGeom prst="rect">
-            <a:avLst/>
-          </a:prstGeom>
-        </p:spPr>
-      </p:pic>
-      <p:sp>
-        <p:nvSpPr>
-          <p:cNvPr id="37" name="Text 31"/>
-          <p:cNvSpPr txBox="1"/>
-          <p:nvPr/>
-        </p:nvSpPr>
-        <p:spPr>
-          <a:xfrm>
-            <a:off x="2148840" y="4562856"/>
-            <a:ext cx="3017520" cy="530352"/>
-          </a:xfrm>
-          <a:prstGeom prst="rect">
-            <a:avLst/>
-          </a:prstGeom>
-          <a:noFill/>
-          <a:ln/>
-        </p:spPr>
-        <p:txBody>
-          <a:bodyPr wrap="square" lIns="0" tIns="0" rIns="0" bIns="0" rtlCol="0" anchor="ctr"/>
-          <a:lstStyle/>
-          <a:p>
-            <a:pPr indent="0" marL="0">
-              <a:buNone/>
-            </a:pPr>
-            <a:r>
-              <a:rPr lang="th-TH" altLang="en-US" sz="2000" b="1" dirty="0">
-                <a:solidFill>
-                  <a:srgbClr val="163A2E"/>
-                </a:solidFill>
-                <a:latin typeface="Leelawadee UI" pitchFamily="34" charset="0"/>
-                <a:ea typeface="Leelawadee UI" pitchFamily="34" charset="-122"/>
-                <a:cs typeface="Leelawadee UI" pitchFamily="34" charset="-120"/>
-              </a:rPr>
-              <a:t>Demo</a:t>
-            </a:r>
-            <a:endParaRPr lang="th-TH" sz="2000" dirty="0"/>
-          </a:p>
-        </p:txBody>
-      </p:sp>
-      <p:sp>
-        <p:nvSpPr>
-          <p:cNvPr id="38" name="Text 32"/>
-          <p:cNvSpPr txBox="1"/>
-          <p:nvPr/>
-        </p:nvSpPr>
-        <p:spPr>
-          <a:xfrm>
-            <a:off x="5212080" y="4562856"/>
-            <a:ext cx="4206240" cy="530352"/>
-          </a:xfrm>
-          <a:prstGeom prst="rect">
-            <a:avLst/>
-          </a:prstGeom>
-          <a:noFill/>
-          <a:ln/>
-        </p:spPr>
-        <p:txBody>
-          <a:bodyPr wrap="square" lIns="0" tIns="0" rIns="0" bIns="0" rtlCol="0" anchor="ctr"/>
-          <a:lstStyle/>
-          <a:p>
-            <a:pPr indent="0" marL="0">
-              <a:buNone/>
-            </a:pPr>
-            <a:r>
-              <a:rPr lang="th-TH" altLang="en-US" sz="1350" dirty="0">
-                <a:solidFill>
-                  <a:srgbClr val="1B1F23"/>
-                </a:solidFill>
-                <a:latin typeface="Leelawadee UI" pitchFamily="34" charset="0"/>
-                <a:ea typeface="Leelawadee UI" pitchFamily="34" charset="-122"/>
-                <a:cs typeface="Leelawadee UI" pitchFamily="34" charset="-120"/>
-              </a:rPr>
-              <a:t>สาธิตระบบจริงบน XAMPP + ผลการทดสอบ</a:t>
-            </a:r>
-            <a:endParaRPr lang="th-TH" sz="1350" dirty="0"/>
-          </a:p>
-        </p:txBody>
-      </p:sp>
-      <p:sp>
-        <p:nvSpPr>
-          <p:cNvPr id="39" name="Text 33"/>
-          <p:cNvSpPr txBox="1"/>
-          <p:nvPr/>
-        </p:nvSpPr>
-        <p:spPr>
-          <a:xfrm>
-            <a:off x="9464040" y="4562856"/>
-            <a:ext cx="1005840" cy="530352"/>
-          </a:xfrm>
-          <a:prstGeom prst="rect">
-            <a:avLst/>
-          </a:prstGeom>
-          <a:noFill/>
-          <a:ln/>
-        </p:spPr>
-        <p:txBody>
-          <a:bodyPr wrap="square" lIns="0" tIns="0" rIns="0" bIns="0" rtlCol="0" anchor="ctr"/>
-          <a:lstStyle/>
-          <a:p>
-            <a:pPr indent="0" marL="0">
-              <a:buNone/>
-            </a:pPr>
-            <a:r>
-              <a:rPr lang="th-TH" altLang="en-US" sz="1200" dirty="0">
-                <a:solidFill>
-                  <a:srgbClr val="5F6B66"/>
-                </a:solidFill>
-                <a:latin typeface="Leelawadee UI" pitchFamily="34" charset="0"/>
-                <a:ea typeface="Leelawadee UI" pitchFamily="34" charset="-122"/>
-                <a:cs typeface="Leelawadee UI" pitchFamily="34" charset="-120"/>
-              </a:rPr>
-              <a:t>สไลด์ 9–12</a:t>
-            </a:r>
-            <a:endParaRPr lang="th-TH" sz="1200" dirty="0"/>
-          </a:p>
-        </p:txBody>
-      </p:sp>
-      <p:sp>
-        <p:nvSpPr>
-          <p:cNvPr id="40" name="Shape 34"/>
-          <p:cNvSpPr/>
-          <p:nvPr/>
-        </p:nvSpPr>
-        <p:spPr>
-          <a:xfrm>
-            <a:off x="10424160" y="4654296"/>
-            <a:ext cx="987552" cy="347472"/>
-          </a:xfrm>
-          <a:prstGeom prst="roundRect">
-            <a:avLst>
-              <a:gd name="adj" fmla="val 50000"/>
-            </a:avLst>
-          </a:prstGeom>
-          <a:solidFill>
-            <a:srgbClr val="D8F3DC"/>
-          </a:solidFill>
-          <a:ln w="12700">
-            <a:solidFill>
-              <a:srgbClr val="D8F3DC"/>
-            </a:solidFill>
-            <a:prstDash val="solid"/>
-          </a:ln>
-        </p:spPr>
-      </p:sp>
-      <p:sp>
-        <p:nvSpPr>
-          <p:cNvPr id="41" name="Text 35"/>
-          <p:cNvSpPr txBox="1"/>
-          <p:nvPr/>
-        </p:nvSpPr>
-        <p:spPr>
-          <a:xfrm>
-            <a:off x="10424160" y="4654296"/>
-            <a:ext cx="987552" cy="347472"/>
-          </a:xfrm>
-          <a:prstGeom prst="rect">
-            <a:avLst/>
-          </a:prstGeom>
-          <a:noFill/>
-          <a:ln/>
-        </p:spPr>
-        <p:txBody>
-          <a:bodyPr wrap="square" lIns="0" tIns="0" rIns="0" bIns="0" rtlCol="0" anchor="ctr"/>
-          <a:lstStyle/>
-          <a:p>
-            <a:pPr algn="ctr" indent="0" marL="0">
-              <a:buNone/>
-            </a:pPr>
-            <a:r>
-              <a:rPr lang="th-TH" altLang="en-US" sz="1050" b="1" dirty="0">
-                <a:solidFill>
-                  <a:srgbClr val="2D6A4F"/>
-                </a:solidFill>
-                <a:latin typeface="Leelawadee UI" pitchFamily="34" charset="0"/>
-                <a:ea typeface="Leelawadee UI" pitchFamily="34" charset="-122"/>
-                <a:cs typeface="Leelawadee UI" pitchFamily="34" charset="-120"/>
-              </a:rPr>
-              <a:t>6–13 นาที</a:t>
-            </a:r>
-            <a:endParaRPr lang="th-TH" sz="1050" dirty="0"/>
-          </a:p>
-        </p:txBody>
-      </p:sp>
-      <p:sp>
-        <p:nvSpPr>
-          <p:cNvPr id="42" name="Shape 36"/>
-          <p:cNvSpPr/>
-          <p:nvPr/>
-        </p:nvSpPr>
-        <p:spPr>
-          <a:xfrm>
-            <a:off x="640080" y="5349240"/>
-            <a:ext cx="10908792" cy="786384"/>
-          </a:xfrm>
-          <a:prstGeom prst="roundRect">
-            <a:avLst>
-              <a:gd name="adj" fmla="val 13953"/>
-            </a:avLst>
-          </a:prstGeom>
-          <a:solidFill>
-            <a:srgbClr val="F7FAF8"/>
-          </a:solidFill>
-          <a:ln w="12700">
-            <a:solidFill>
-              <a:srgbClr val="DDE5E0"/>
-            </a:solidFill>
-            <a:prstDash val="solid"/>
-          </a:ln>
-        </p:spPr>
-      </p:sp>
-      <p:sp>
-        <p:nvSpPr>
-          <p:cNvPr id="43" name="Text 37"/>
+          <p:cNvPr id="31" name="Text 25"/>
           <p:cNvSpPr txBox="1"/>
           <p:nvPr/>
         </p:nvSpPr>
@@ -10463,7 +10043,7 @@
       </p:sp>
       <p:sp>
         <p:nvSpPr>
-          <p:cNvPr id="44" name="Shape 38"/>
+          <p:cNvPr id="32" name="Shape 26"/>
           <p:cNvSpPr/>
           <p:nvPr/>
         </p:nvSpPr>
@@ -10488,7 +10068,7 @@
       </p:sp>
       <p:pic>
         <p:nvPicPr>
-          <p:cNvPr id="45" name="Image 4" descr="preencoded.png">    </p:cNvPr>
+          <p:cNvPr id="33" name="Image 4" descr="preencoded.png">    </p:cNvPr>
           <p:cNvPicPr>
             <a:picLocks noChangeAspect="1"/>
           </p:cNvPicPr>
@@ -10512,7 +10092,7 @@
       </p:pic>
       <p:sp>
         <p:nvSpPr>
-          <p:cNvPr id="46" name="Text 39"/>
+          <p:cNvPr id="34" name="Text 27"/>
           <p:cNvSpPr txBox="1"/>
           <p:nvPr/>
         </p:nvSpPr>
@@ -10551,14 +10131,14 @@
       </p:sp>
       <p:sp>
         <p:nvSpPr>
-          <p:cNvPr id="47" name="Text 40"/>
+          <p:cNvPr id="35" name="Text 28"/>
           <p:cNvSpPr txBox="1"/>
           <p:nvPr/>
         </p:nvSpPr>
         <p:spPr>
           <a:xfrm>
             <a:off x="5212080" y="5477256"/>
-            <a:ext cx="4206240" cy="530352"/>
+            <a:ext cx="6126480" cy="530352"/>
           </a:xfrm>
           <a:prstGeom prst="rect">
             <a:avLst/>
@@ -10574,7 +10154,7 @@
               <a:buNone/>
             </a:pPr>
             <a:r>
-              <a:rPr lang="th-TH" altLang="en-US" sz="1350" dirty="0">
+              <a:rPr lang="th-TH" altLang="en-US" sz="1400" dirty="0">
                 <a:solidFill>
                   <a:srgbClr val="1B1F23"/>
                 </a:solidFill>
@@ -10584,112 +10164,7 @@
               </a:rPr>
               <a:t>สรุปผล แล้วตอบคำถามจากอาจารย์</a:t>
             </a:r>
-            <a:endParaRPr lang="th-TH" sz="1350" dirty="0"/>
-          </a:p>
-        </p:txBody>
-      </p:sp>
-      <p:sp>
-        <p:nvSpPr>
-          <p:cNvPr id="48" name="Text 41"/>
-          <p:cNvSpPr txBox="1"/>
-          <p:nvPr/>
-        </p:nvSpPr>
-        <p:spPr>
-          <a:xfrm>
-            <a:off x="9464040" y="5477256"/>
-            <a:ext cx="1005840" cy="530352"/>
-          </a:xfrm>
-          <a:prstGeom prst="rect">
-            <a:avLst/>
-          </a:prstGeom>
-          <a:noFill/>
-          <a:ln/>
-        </p:spPr>
-        <p:txBody>
-          <a:bodyPr wrap="square" lIns="0" tIns="0" rIns="0" bIns="0" rtlCol="0" anchor="ctr"/>
-          <a:lstStyle/>
-          <a:p>
-            <a:pPr indent="0" marL="0">
-              <a:buNone/>
-            </a:pPr>
-            <a:r>
-              <a:rPr lang="th-TH" altLang="en-US" sz="1200" dirty="0">
-                <a:solidFill>
-                  <a:srgbClr val="5F6B66"/>
-                </a:solidFill>
-                <a:latin typeface="Leelawadee UI" pitchFamily="34" charset="0"/>
-                <a:ea typeface="Leelawadee UI" pitchFamily="34" charset="-122"/>
-                <a:cs typeface="Leelawadee UI" pitchFamily="34" charset="-120"/>
-              </a:rPr>
-              <a:t>สไลด์ 13–14</a:t>
-            </a:r>
-            <a:endParaRPr lang="th-TH" sz="1200" dirty="0"/>
-          </a:p>
-        </p:txBody>
-      </p:sp>
-      <p:sp>
-        <p:nvSpPr>
-          <p:cNvPr id="49" name="Shape 42"/>
-          <p:cNvSpPr/>
-          <p:nvPr/>
-        </p:nvSpPr>
-        <p:spPr>
-          <a:xfrm>
-            <a:off x="10424160" y="5568696"/>
-            <a:ext cx="987552" cy="347472"/>
-          </a:xfrm>
-          <a:prstGeom prst="roundRect">
-            <a:avLst>
-              <a:gd name="adj" fmla="val 50000"/>
-            </a:avLst>
-          </a:prstGeom>
-          <a:solidFill>
-            <a:srgbClr val="FDF3E1"/>
-          </a:solidFill>
-          <a:ln w="12700">
-            <a:solidFill>
-              <a:srgbClr val="FDF3E1"/>
-            </a:solidFill>
-            <a:prstDash val="solid"/>
-          </a:ln>
-        </p:spPr>
-      </p:sp>
-      <p:sp>
-        <p:nvSpPr>
-          <p:cNvPr id="50" name="Text 43"/>
-          <p:cNvSpPr txBox="1"/>
-          <p:nvPr/>
-        </p:nvSpPr>
-        <p:spPr>
-          <a:xfrm>
-            <a:off x="10424160" y="5568696"/>
-            <a:ext cx="987552" cy="347472"/>
-          </a:xfrm>
-          <a:prstGeom prst="rect">
-            <a:avLst/>
-          </a:prstGeom>
-          <a:noFill/>
-          <a:ln/>
-        </p:spPr>
-        <p:txBody>
-          <a:bodyPr wrap="square" lIns="0" tIns="0" rIns="0" bIns="0" rtlCol="0" anchor="ctr"/>
-          <a:lstStyle/>
-          <a:p>
-            <a:pPr algn="ctr" indent="0" marL="0">
-              <a:buNone/>
-            </a:pPr>
-            <a:r>
-              <a:rPr lang="th-TH" altLang="en-US" sz="1050" b="1" dirty="0">
-                <a:solidFill>
-                  <a:srgbClr val="B7791F"/>
-                </a:solidFill>
-                <a:latin typeface="Leelawadee UI" pitchFamily="34" charset="0"/>
-                <a:ea typeface="Leelawadee UI" pitchFamily="34" charset="-122"/>
-                <a:cs typeface="Leelawadee UI" pitchFamily="34" charset="-120"/>
-              </a:rPr>
-              <a:t>13–15 นาที</a:t>
-            </a:r>
-            <a:endParaRPr lang="th-TH" sz="1050" dirty="0"/>
+            <a:endParaRPr lang="th-TH" sz="1400" dirty="0"/>
           </a:p>
         </p:txBody>
       </p:sp>
